--- a/Java_ppt/5장. 상속과 다형성.pptx
+++ b/Java_ppt/5장. 상속과 다형성.pptx
@@ -237,7 +237,7 @@
           <a:p>
             <a:fld id="{7665CDAC-D627-4E87-877A-1B781DD4CADC}" type="datetimeFigureOut">
               <a:rPr lang="ko-KR" altLang="en-US" smtClean="0"/>
-              <a:t>2026-07-28</a:t>
+              <a:t>2026-08-12</a:t>
             </a:fld>
             <a:endParaRPr lang="ko-KR" altLang="en-US"/>
           </a:p>
@@ -772,7 +772,7 @@
           <a:p>
             <a:fld id="{F4AC81B4-D91A-4578-85B3-829E63FCFE17}" type="datetime1">
               <a:rPr lang="ko-KR" altLang="en-US" smtClean="0"/>
-              <a:t>2026-07-28</a:t>
+              <a:t>2026-08-12</a:t>
             </a:fld>
             <a:endParaRPr lang="ko-KR" altLang="en-US"/>
           </a:p>
@@ -1145,7 +1145,7 @@
           <a:p>
             <a:fld id="{F5B77542-37E5-48F2-BAE7-80CC6B0EB6A3}" type="datetime1">
               <a:rPr lang="ko-KR" altLang="en-US" smtClean="0"/>
-              <a:t>2026-07-28</a:t>
+              <a:t>2026-08-12</a:t>
             </a:fld>
             <a:endParaRPr lang="ko-KR" altLang="en-US"/>
           </a:p>
@@ -1323,7 +1323,7 @@
           <a:p>
             <a:fld id="{227CF174-B5AC-4A98-B673-0BE8126D3F27}" type="datetime1">
               <a:rPr lang="ko-KR" altLang="en-US" smtClean="0"/>
-              <a:t>2026-07-28</a:t>
+              <a:t>2026-08-12</a:t>
             </a:fld>
             <a:endParaRPr lang="ko-KR" altLang="en-US"/>
           </a:p>
@@ -1495,7 +1495,7 @@
           <a:p>
             <a:fld id="{E20FDEC8-1339-42E8-9704-2977280C2FD3}" type="datetime1">
               <a:rPr lang="ko-KR" altLang="en-US" smtClean="0"/>
-              <a:t>2026-07-28</a:t>
+              <a:t>2026-08-12</a:t>
             </a:fld>
             <a:endParaRPr lang="ko-KR" altLang="en-US"/>
           </a:p>
@@ -1740,7 +1740,7 @@
           <a:p>
             <a:fld id="{4D18DC76-A282-4817-B790-197F054E1215}" type="datetime1">
               <a:rPr lang="ko-KR" altLang="en-US" smtClean="0"/>
-              <a:t>2026-07-28</a:t>
+              <a:t>2026-08-12</a:t>
             </a:fld>
             <a:endParaRPr lang="ko-KR" altLang="en-US"/>
           </a:p>
@@ -2025,7 +2025,7 @@
           <a:p>
             <a:fld id="{6680AA6C-13D8-43E4-90F0-E6C88A2B9F16}" type="datetime1">
               <a:rPr lang="ko-KR" altLang="en-US" smtClean="0"/>
-              <a:t>2026-07-28</a:t>
+              <a:t>2026-08-12</a:t>
             </a:fld>
             <a:endParaRPr lang="ko-KR" altLang="en-US"/>
           </a:p>
@@ -2444,7 +2444,7 @@
           <a:p>
             <a:fld id="{3EF5B03B-20CC-436E-8601-C933C6C1F4A6}" type="datetime1">
               <a:rPr lang="ko-KR" altLang="en-US" smtClean="0"/>
-              <a:t>2026-07-28</a:t>
+              <a:t>2026-08-12</a:t>
             </a:fld>
             <a:endParaRPr lang="ko-KR" altLang="en-US"/>
           </a:p>
@@ -2561,7 +2561,7 @@
           <a:p>
             <a:fld id="{87B5A15D-8B08-482F-AB47-E416EC355EB6}" type="datetime1">
               <a:rPr lang="ko-KR" altLang="en-US" smtClean="0"/>
-              <a:t>2026-07-28</a:t>
+              <a:t>2026-08-12</a:t>
             </a:fld>
             <a:endParaRPr lang="ko-KR" altLang="en-US"/>
           </a:p>
@@ -2656,7 +2656,7 @@
           <a:p>
             <a:fld id="{A877D7F8-7B64-44F8-A411-CBD22F28CBFF}" type="datetime1">
               <a:rPr lang="ko-KR" altLang="en-US" smtClean="0"/>
-              <a:t>2026-07-28</a:t>
+              <a:t>2026-08-12</a:t>
             </a:fld>
             <a:endParaRPr lang="ko-KR" altLang="en-US"/>
           </a:p>
@@ -2931,7 +2931,7 @@
           <a:p>
             <a:fld id="{E12DBD9B-2BB6-4D1F-BCB4-1E48829C93C3}" type="datetime1">
               <a:rPr lang="ko-KR" altLang="en-US" smtClean="0"/>
-              <a:t>2026-07-28</a:t>
+              <a:t>2026-08-12</a:t>
             </a:fld>
             <a:endParaRPr lang="ko-KR" altLang="en-US"/>
           </a:p>
@@ -3183,7 +3183,7 @@
           <a:p>
             <a:fld id="{17564C48-0CD7-40EB-BE64-BBF4DB8C56AF}" type="datetime1">
               <a:rPr lang="ko-KR" altLang="en-US" smtClean="0"/>
-              <a:t>2026-07-28</a:t>
+              <a:t>2026-08-12</a:t>
             </a:fld>
             <a:endParaRPr lang="ko-KR" altLang="en-US"/>
           </a:p>
@@ -3362,7 +3362,7 @@
           <a:p>
             <a:fld id="{C116BCB4-B68B-4638-8167-F4BDC0A30DA1}" type="datetime1">
               <a:rPr lang="ko-KR" altLang="en-US" smtClean="0"/>
-              <a:t>2026-07-28</a:t>
+              <a:t>2026-08-12</a:t>
             </a:fld>
             <a:endParaRPr lang="ko-KR" altLang="en-US"/>
           </a:p>
@@ -13053,7 +13053,7 @@
         </p:nvGrpSpPr>
         <p:grpSpPr>
           <a:xfrm rot="16200000">
-            <a:off x="4465455" y="2633441"/>
+            <a:off x="5113527" y="2633441"/>
             <a:ext cx="183001" cy="771552"/>
             <a:chOff x="4022240" y="4146776"/>
             <a:chExt cx="164428" cy="628486"/>
@@ -13156,6 +13156,163 @@
         <p:spPr>
           <a:xfrm>
             <a:off x="1712640" y="1880828"/>
+            <a:ext cx="2654030" cy="504056"/>
+          </a:xfrm>
+          <a:prstGeom prst="rect">
+            <a:avLst/>
+          </a:prstGeom>
+          <a:ln/>
+        </p:spPr>
+        <p:style>
+          <a:lnRef idx="2">
+            <a:schemeClr val="accent1"/>
+          </a:lnRef>
+          <a:fillRef idx="1">
+            <a:schemeClr val="lt1"/>
+          </a:fillRef>
+          <a:effectRef idx="0">
+            <a:schemeClr val="accent1"/>
+          </a:effectRef>
+          <a:fontRef idx="minor">
+            <a:schemeClr val="dk1"/>
+          </a:fontRef>
+        </p:style>
+        <p:txBody>
+          <a:bodyPr rtlCol="0" anchor="ctr"/>
+          <a:lstStyle/>
+          <a:p>
+            <a:pPr algn="ctr"/>
+            <a:r>
+              <a:rPr lang="en-US" altLang="ko-KR" sz="2000" dirty="0"/>
+              <a:t>Car</a:t>
+            </a:r>
+            <a:endParaRPr lang="ko-KR" altLang="en-US" sz="2000" dirty="0"/>
+          </a:p>
+        </p:txBody>
+      </p:sp>
+      <p:sp>
+        <p:nvSpPr>
+          <p:cNvPr id="18" name="직사각형 17"/>
+          <p:cNvSpPr/>
+          <p:nvPr/>
+        </p:nvSpPr>
+        <p:spPr>
+          <a:xfrm>
+            <a:off x="1712640" y="2384884"/>
+            <a:ext cx="2654030" cy="1008112"/>
+          </a:xfrm>
+          <a:prstGeom prst="rect">
+            <a:avLst/>
+          </a:prstGeom>
+          <a:ln/>
+        </p:spPr>
+        <p:style>
+          <a:lnRef idx="2">
+            <a:schemeClr val="accent1"/>
+          </a:lnRef>
+          <a:fillRef idx="1">
+            <a:schemeClr val="lt1"/>
+          </a:fillRef>
+          <a:effectRef idx="0">
+            <a:schemeClr val="accent1"/>
+          </a:effectRef>
+          <a:fontRef idx="minor">
+            <a:schemeClr val="dk1"/>
+          </a:fontRef>
+        </p:style>
+        <p:txBody>
+          <a:bodyPr rtlCol="0" anchor="ctr"/>
+          <a:lstStyle/>
+          <a:p>
+            <a:r>
+              <a:rPr lang="en-US" altLang="ko-KR" sz="2000" dirty="0"/>
+              <a:t> -brand</a:t>
+            </a:r>
+          </a:p>
+          <a:p>
+            <a:r>
+              <a:rPr lang="en-US" altLang="ko-KR" sz="2000" dirty="0"/>
+              <a:t> -model</a:t>
+            </a:r>
+          </a:p>
+          <a:p>
+            <a:r>
+              <a:rPr lang="en-US" altLang="ko-KR" sz="2000" dirty="0"/>
+              <a:t> -speed</a:t>
+            </a:r>
+          </a:p>
+        </p:txBody>
+      </p:sp>
+      <p:sp>
+        <p:nvSpPr>
+          <p:cNvPr id="19" name="직사각형 18"/>
+          <p:cNvSpPr/>
+          <p:nvPr/>
+        </p:nvSpPr>
+        <p:spPr>
+          <a:xfrm>
+            <a:off x="1712640" y="3374443"/>
+            <a:ext cx="2654030" cy="986016"/>
+          </a:xfrm>
+          <a:prstGeom prst="rect">
+            <a:avLst/>
+          </a:prstGeom>
+          <a:ln/>
+        </p:spPr>
+        <p:style>
+          <a:lnRef idx="2">
+            <a:schemeClr val="accent1"/>
+          </a:lnRef>
+          <a:fillRef idx="1">
+            <a:schemeClr val="lt1"/>
+          </a:fillRef>
+          <a:effectRef idx="0">
+            <a:schemeClr val="accent1"/>
+          </a:effectRef>
+          <a:fontRef idx="minor">
+            <a:schemeClr val="dk1"/>
+          </a:fontRef>
+        </p:style>
+        <p:txBody>
+          <a:bodyPr rtlCol="0" anchor="ctr"/>
+          <a:lstStyle/>
+          <a:p>
+            <a:r>
+              <a:rPr lang="en-US" altLang="ko-KR" sz="2000" dirty="0"/>
+              <a:t> +accelerate()</a:t>
+            </a:r>
+          </a:p>
+          <a:p>
+            <a:r>
+              <a:rPr lang="en-US" altLang="ko-KR" sz="2000" dirty="0"/>
+              <a:t> +brake()</a:t>
+            </a:r>
+          </a:p>
+          <a:p>
+            <a:r>
+              <a:rPr lang="en-US" altLang="ko-KR" sz="2000" dirty="0"/>
+              <a:t> +</a:t>
+            </a:r>
+            <a:r>
+              <a:rPr lang="en-US" altLang="ko-KR" sz="2000" dirty="0" err="1"/>
+              <a:t>showInfo</a:t>
+            </a:r>
+            <a:r>
+              <a:rPr lang="en-US" altLang="ko-KR" sz="2000" dirty="0"/>
+              <a:t>()</a:t>
+            </a:r>
+          </a:p>
+        </p:txBody>
+      </p:sp>
+      <p:sp>
+        <p:nvSpPr>
+          <p:cNvPr id="25" name="직사각형 24"/>
+          <p:cNvSpPr/>
+          <p:nvPr/>
+        </p:nvSpPr>
+        <p:spPr>
+          <a:xfrm>
+            <a:off x="5673080" y="2132856"/>
             <a:ext cx="2160240" cy="504056"/>
           </a:xfrm>
           <a:prstGeom prst="rect">
@@ -13184,11 +13341,11 @@
             <a:pPr algn="ctr"/>
             <a:r>
               <a:rPr lang="en-US" altLang="ko-KR" sz="2000" dirty="0"/>
-              <a:t>Car(</a:t>
+              <a:t>EV(</a:t>
             </a:r>
             <a:r>
               <a:rPr lang="ko-KR" altLang="en-US" sz="2000" dirty="0"/>
-              <a:t>차량</a:t>
+              <a:t>전기차</a:t>
             </a:r>
             <a:r>
               <a:rPr lang="en-US" altLang="ko-KR" sz="2000" dirty="0"/>
@@ -13200,127 +13357,13 @@
       </p:sp>
       <p:sp>
         <p:nvSpPr>
-          <p:cNvPr id="18" name="직사각형 17"/>
+          <p:cNvPr id="26" name="직사각형 25"/>
           <p:cNvSpPr/>
           <p:nvPr/>
         </p:nvSpPr>
         <p:spPr>
           <a:xfrm>
-            <a:off x="1712640" y="2384884"/>
-            <a:ext cx="2160240" cy="1008112"/>
-          </a:xfrm>
-          <a:prstGeom prst="rect">
-            <a:avLst/>
-          </a:prstGeom>
-          <a:ln/>
-        </p:spPr>
-        <p:style>
-          <a:lnRef idx="2">
-            <a:schemeClr val="accent1"/>
-          </a:lnRef>
-          <a:fillRef idx="1">
-            <a:schemeClr val="lt1"/>
-          </a:fillRef>
-          <a:effectRef idx="0">
-            <a:schemeClr val="accent1"/>
-          </a:effectRef>
-          <a:fontRef idx="minor">
-            <a:schemeClr val="dk1"/>
-          </a:fontRef>
-        </p:style>
-        <p:txBody>
-          <a:bodyPr rtlCol="0" anchor="ctr"/>
-          <a:lstStyle/>
-          <a:p>
-            <a:r>
-              <a:rPr lang="en-US" altLang="ko-KR" sz="2000" dirty="0"/>
-              <a:t> brand</a:t>
-            </a:r>
-          </a:p>
-          <a:p>
-            <a:r>
-              <a:rPr lang="en-US" altLang="ko-KR" sz="2000" dirty="0"/>
-              <a:t> model</a:t>
-            </a:r>
-          </a:p>
-          <a:p>
-            <a:r>
-              <a:rPr lang="en-US" altLang="ko-KR" sz="2000" dirty="0"/>
-              <a:t> speed</a:t>
-            </a:r>
-          </a:p>
-        </p:txBody>
-      </p:sp>
-      <p:sp>
-        <p:nvSpPr>
-          <p:cNvPr id="19" name="직사각형 18"/>
-          <p:cNvSpPr/>
-          <p:nvPr/>
-        </p:nvSpPr>
-        <p:spPr>
-          <a:xfrm>
-            <a:off x="1712640" y="3374443"/>
-            <a:ext cx="2160240" cy="986016"/>
-          </a:xfrm>
-          <a:prstGeom prst="rect">
-            <a:avLst/>
-          </a:prstGeom>
-          <a:ln/>
-        </p:spPr>
-        <p:style>
-          <a:lnRef idx="2">
-            <a:schemeClr val="accent1"/>
-          </a:lnRef>
-          <a:fillRef idx="1">
-            <a:schemeClr val="lt1"/>
-          </a:fillRef>
-          <a:effectRef idx="0">
-            <a:schemeClr val="accent1"/>
-          </a:effectRef>
-          <a:fontRef idx="minor">
-            <a:schemeClr val="dk1"/>
-          </a:fontRef>
-        </p:style>
-        <p:txBody>
-          <a:bodyPr rtlCol="0" anchor="ctr"/>
-          <a:lstStyle/>
-          <a:p>
-            <a:r>
-              <a:rPr lang="en-US" altLang="ko-KR" sz="2000" dirty="0"/>
-              <a:t> accelerate()</a:t>
-            </a:r>
-          </a:p>
-          <a:p>
-            <a:r>
-              <a:rPr lang="en-US" altLang="ko-KR" sz="2000" dirty="0"/>
-              <a:t> brake()</a:t>
-            </a:r>
-          </a:p>
-          <a:p>
-            <a:r>
-              <a:rPr lang="en-US" altLang="ko-KR" sz="2000" dirty="0"/>
-              <a:t> </a:t>
-            </a:r>
-            <a:r>
-              <a:rPr lang="en-US" altLang="ko-KR" sz="2000" dirty="0" err="1"/>
-              <a:t>showInfo</a:t>
-            </a:r>
-            <a:r>
-              <a:rPr lang="en-US" altLang="ko-KR" sz="2000" dirty="0"/>
-              <a:t>()</a:t>
-            </a:r>
-          </a:p>
-        </p:txBody>
-      </p:sp>
-      <p:sp>
-        <p:nvSpPr>
-          <p:cNvPr id="25" name="직사각형 24"/>
-          <p:cNvSpPr/>
-          <p:nvPr/>
-        </p:nvSpPr>
-        <p:spPr>
-          <a:xfrm>
-            <a:off x="5025008" y="2132856"/>
+            <a:off x="5673080" y="2636912"/>
             <a:ext cx="2160240" cy="504056"/>
           </a:xfrm>
           <a:prstGeom prst="rect">
@@ -13346,57 +13389,6 @@
           <a:bodyPr rtlCol="0" anchor="ctr"/>
           <a:lstStyle/>
           <a:p>
-            <a:pPr algn="ctr"/>
-            <a:r>
-              <a:rPr lang="en-US" altLang="ko-KR" sz="2000" dirty="0"/>
-              <a:t>EV(</a:t>
-            </a:r>
-            <a:r>
-              <a:rPr lang="ko-KR" altLang="en-US" sz="2000" dirty="0"/>
-              <a:t>전기차</a:t>
-            </a:r>
-            <a:r>
-              <a:rPr lang="en-US" altLang="ko-KR" sz="2000" dirty="0"/>
-              <a:t>)</a:t>
-            </a:r>
-            <a:endParaRPr lang="ko-KR" altLang="en-US" sz="2000" dirty="0"/>
-          </a:p>
-        </p:txBody>
-      </p:sp>
-      <p:sp>
-        <p:nvSpPr>
-          <p:cNvPr id="26" name="직사각형 25"/>
-          <p:cNvSpPr/>
-          <p:nvPr/>
-        </p:nvSpPr>
-        <p:spPr>
-          <a:xfrm>
-            <a:off x="5025008" y="2636912"/>
-            <a:ext cx="2160240" cy="504056"/>
-          </a:xfrm>
-          <a:prstGeom prst="rect">
-            <a:avLst/>
-          </a:prstGeom>
-          <a:ln/>
-        </p:spPr>
-        <p:style>
-          <a:lnRef idx="2">
-            <a:schemeClr val="accent1"/>
-          </a:lnRef>
-          <a:fillRef idx="1">
-            <a:schemeClr val="lt1"/>
-          </a:fillRef>
-          <a:effectRef idx="0">
-            <a:schemeClr val="accent1"/>
-          </a:effectRef>
-          <a:fontRef idx="minor">
-            <a:schemeClr val="dk1"/>
-          </a:fontRef>
-        </p:style>
-        <p:txBody>
-          <a:bodyPr rtlCol="0" anchor="ctr"/>
-          <a:lstStyle/>
-          <a:p>
             <a:r>
               <a:rPr lang="en-US" altLang="ko-KR" sz="2000" dirty="0"/>
               <a:t> battery</a:t>
@@ -13412,7 +13404,7 @@
         </p:nvSpPr>
         <p:spPr>
           <a:xfrm>
-            <a:off x="5025008" y="3142821"/>
+            <a:off x="5673080" y="3142821"/>
             <a:ext cx="2160240" cy="862243"/>
           </a:xfrm>
           <a:prstGeom prst="rect">
